--- a/labs/Lab02/slides.pptx
+++ b/labs/Lab02/slides.pptx
@@ -773,7 +773,7 @@
           <a:p>
             <a:r>
               <a:rPr lang="en-US" dirty="0"/>
-              <a:t>Ask for a plausible defect each assertion would catch. Supplied adapter tests earn no student test credit.</a:t>
+              <a:t>Ask for a plausible defect each assertion would catch.</a:t>
             </a:r>
             <a:endParaRPr lang="en-US" dirty="0"/>
           </a:p>
